--- a/docs/week-11/cen429-week-11-sunum.en.pptx
+++ b/docs/week-11/cen429-week-11-sunum.en.pptx
@@ -751,7 +751,7 @@
           <a:lstStyle/>
           <a:p>
             <a:r>
-              <a:t>önce sordur, sonra aç.</a:t>
+              <a:t>Bütün haftayı tek senaryoda toplayan sentetik, savunma amaçlı bir örnek.</a:t>
             </a:r>
           </a:p>
         </p:txBody>
@@ -821,7 +821,7 @@
           <a:lstStyle/>
           <a:p>
             <a:r>
-              <a:t>Bütün haftayı tek senaryoda toplayan sentetik, savunma amaçlı bir örnek.</a:t>
+              <a:t>Chow AES'i gerçek boyutta göstermek zor. Onun yerine 4 değerli oyuncak bir S-box'la "anahtarı tabloya pişirme" fikrini somutlaştırıyoruz. Tahtada yapılabilir.</a:t>
             </a:r>
           </a:p>
         </p:txBody>
@@ -891,76 +891,6 @@
           <a:lstStyle/>
           <a:p>
             <a:r>
-              <a:t>Chow AES'i gerçek boyutta göstermek zor. Onun yerine 4 değerli oyuncak bir S-box'la "anahtarı tabloya pişirme" fikrini somutlaştırıyoruz. Tahtada yapılabilir.</a:t>
-            </a:r>
-          </a:p>
-        </p:txBody>
-      </p:sp>
-      <p:sp>
-        <p:nvSpPr>
-          <p:cNvPr id="4" name="Slide Number Placeholder 3"/>
-          <p:cNvSpPr>
-            <a:spLocks noGrp="1"/>
-          </p:cNvSpPr>
-          <p:nvPr>
-            <p:ph type="sldNum" idx="5" sz="quarter"/>
-          </p:nvPr>
-        </p:nvSpPr>
-        <p:spPr/>
-      </p:sp>
-    </p:spTree>
-  </p:cSld>
-  <p:clrMapOvr>
-    <a:masterClrMapping/>
-  </p:clrMapOvr>
-</p:notes>
-</file>
-
-<file path=ppt/notesSlides/notesSlide13.xml><?xml version="1.0" encoding="utf-8"?>
-<p:notes xmlns:a="http://schemas.openxmlformats.org/drawingml/2006/main" xmlns:p="http://schemas.openxmlformats.org/presentationml/2006/main" xmlns:r="http://schemas.openxmlformats.org/officeDocument/2006/relationships">
-  <p:cSld>
-    <p:spTree>
-      <p:nvGrpSpPr>
-        <p:cNvPr id="1" name=""/>
-        <p:cNvGrpSpPr/>
-        <p:nvPr/>
-      </p:nvGrpSpPr>
-      <p:grpSpPr>
-        <a:xfrm>
-          <a:off x="0" y="0"/>
-          <a:ext cx="0" cy="0"/>
-          <a:chOff x="0" y="0"/>
-          <a:chExt cx="0" cy="0"/>
-        </a:xfrm>
-      </p:grpSpPr>
-      <p:sp>
-        <p:nvSpPr>
-          <p:cNvPr id="2" name="Slide Image Placeholder 1"/>
-          <p:cNvSpPr>
-            <a:spLocks noGrp="1"/>
-          </p:cNvSpPr>
-          <p:nvPr>
-            <p:ph type="sldImg" idx="2"/>
-          </p:nvPr>
-        </p:nvSpPr>
-        <p:spPr/>
-      </p:sp>
-      <p:sp>
-        <p:nvSpPr>
-          <p:cNvPr id="3" name="Notes Placeholder 2"/>
-          <p:cNvSpPr>
-            <a:spLocks noGrp="1"/>
-          </p:cNvSpPr>
-          <p:nvPr>
-            <p:ph type="body" idx="3" sz="quarter"/>
-          </p:nvPr>
-        </p:nvSpPr>
-        <p:spPr/>
-        <p:txBody>
-          <a:bodyPr/>
-          <a:lstStyle/>
-          <a:p>
-            <a:r>
               <a:t>Soruları tek tek, cevabıyla birlikte işliyoruz. Önce öğrenciye sordurun, sonra cevabı açın.</a:t>
             </a:r>
           </a:p>
@@ -1241,19 +1171,7 @@
           <a:lstStyle/>
           <a:p>
             <a:r>
-              <a:t>kara kutu</a:t>
-            </a:r>
-          </a:p>
-          <a:p/>
-          <a:p>
-            <a:r>
-              <a:t>gri kutu</a:t>
-            </a:r>
-          </a:p>
-          <a:p/>
-          <a:p>
-            <a:r>
-              <a:t>beyaz kutu</a:t>
+              <a:t>önce sordur, sonra aç.</a:t>
             </a:r>
           </a:p>
         </p:txBody>
@@ -1323,7 +1241,7 @@
           <a:lstStyle/>
           <a:p>
             <a:r>
-              <a:t>önce sordur, sonra aç.</a:t>
+              <a:t>Chow AES'in fikrini adım adım kuruyoruz. Matematiği değil, mantığı ve maliyeti öğreteceğiz. Yavaş gidin.</a:t>
             </a:r>
           </a:p>
         </p:txBody>
@@ -1393,7 +1311,7 @@
           <a:lstStyle/>
           <a:p>
             <a:r>
-              <a:t>Chow AES'in fikrini adım adım kuruyoruz. Matematiği değil, mantığı ve maliyeti öğreteceğiz. Yavaş gidin.</a:t>
+              <a:t>önce sordur, sonra aç; ara sonrası saldırı geçmişi.</a:t>
             </a:r>
           </a:p>
         </p:txBody>
@@ -1463,7 +1381,7 @@
           <a:lstStyle/>
           <a:p>
             <a:r>
-              <a:t>önce sordur, sonra aç; ara sonrası saldırı geçmişi.</a:t>
+              <a:t>Bu geçmişi saldırı öğretmek için değil, "bu korumaya ne kadar güvenebilirim?" sorusunu yanıtlamak için anlatıyoruz.</a:t>
             </a:r>
           </a:p>
         </p:txBody>
@@ -1533,7 +1451,7 @@
           <a:lstStyle/>
           <a:p>
             <a:r>
-              <a:t>Bu geçmişi saldırı öğretmek için değil, "bu korumaya ne kadar güvenebilirim?" sorusunu yanıtlamak için anlatıyoruz.</a:t>
+              <a:t>önce sordur, sonra aç.</a:t>
             </a:r>
           </a:p>
         </p:txBody>
@@ -35434,142 +35352,30 @@
           </a:p>
         </p:txBody>
       </p:sp>
-      <p:sp>
-        <p:nvSpPr>
-          <p:cNvPr id="7" name="TextBox 6"/>
-          <p:cNvSpPr txBox="1"/>
-          <p:nvPr/>
-        </p:nvSpPr>
-        <p:spPr>
-          <a:xfrm>
-            <a:off x="640080" y="1325880"/>
-            <a:ext cx="10911535" cy="324358"/>
-          </a:xfrm>
-          <a:prstGeom prst="rect">
-            <a:avLst/>
-          </a:prstGeom>
-          <a:noFill/>
-        </p:spPr>
-        <p:txBody>
-          <a:bodyPr wrap="square" lIns="45720" rIns="45720">
-            <a:spAutoFit/>
-          </a:bodyPr>
-          <a:lstStyle/>
-          <a:p>
-            <a:pPr algn="l"/>
-            <a:r>
-              <a:rPr sz="1300" b="0">
-                <a:solidFill>
-                  <a:srgbClr val="1F2D3A"/>
-                </a:solidFill>
-              </a:rPr>
-              <a:t>&lt;svg viewBox="0 0 960 290" style="width:96%;height:auto;display:block;margin:2px auto" font-family="sans-serif"&gt;</a:t>
-            </a:r>
-          </a:p>
-        </p:txBody>
-      </p:sp>
-      <p:sp>
-        <p:nvSpPr>
-          <p:cNvPr id="8" name="TextBox 7"/>
-          <p:cNvSpPr txBox="1"/>
-          <p:nvPr/>
-        </p:nvSpPr>
-        <p:spPr>
-          <a:xfrm>
-            <a:off x="640080" y="1759966"/>
-            <a:ext cx="10911535" cy="1182878"/>
-          </a:xfrm>
-          <a:prstGeom prst="rect">
-            <a:avLst/>
-          </a:prstGeom>
-          <a:noFill/>
-        </p:spPr>
-        <p:txBody>
-          <a:bodyPr wrap="square" lIns="45720" rIns="45720">
-            <a:spAutoFit/>
-          </a:bodyPr>
-          <a:lstStyle/>
-          <a:p>
-            <a:pPr algn="l"/>
-            <a:r>
-              <a:rPr sz="1300" b="0">
-                <a:solidFill>
-                  <a:srgbClr val="1F2D3A"/>
-                </a:solidFill>
-              </a:rPr>
-              <a:t>&lt;rect x="20" y="55" width="290" height="185" rx="12" fill="#20232a"/&gt; &lt;text x="165" y="86" text-anchor="middle" font-size="20" fill="#fff" font-weight="bold"&gt;KARA KUTU&lt;/text&gt; &lt;rect x="70" y="105" width="190" height="70" rx="8" fill="#3a3f4a"/&gt;&lt;text x="165" y="146" text-anchor="middle" font-size="15" fill="#888"&gt;? gizli ?&lt;/text&gt; &lt;text x="165" y="200" text-anchor="middle" font-size="14" fill="#9ed6d7"&gt;yalnız giriş → çıkış&lt;/text&gt; &lt;text x="165" y="224" text-anchor="middle" font-size="13" fill="#aaa"&gt;klasik AES kanıtı bunu varsayar&lt;/text&gt;</a:t>
-            </a:r>
-          </a:p>
-        </p:txBody>
-      </p:sp>
-      <p:sp>
-        <p:nvSpPr>
-          <p:cNvPr id="9" name="TextBox 8"/>
-          <p:cNvSpPr txBox="1"/>
-          <p:nvPr/>
-        </p:nvSpPr>
-        <p:spPr>
-          <a:xfrm>
-            <a:off x="640080" y="3052572"/>
-            <a:ext cx="10911535" cy="1182878"/>
-          </a:xfrm>
-          <a:prstGeom prst="rect">
-            <a:avLst/>
-          </a:prstGeom>
-          <a:noFill/>
-        </p:spPr>
-        <p:txBody>
-          <a:bodyPr wrap="square" lIns="45720" rIns="45720">
-            <a:spAutoFit/>
-          </a:bodyPr>
-          <a:lstStyle/>
-          <a:p>
-            <a:pPr algn="l"/>
-            <a:r>
-              <a:rPr sz="1300" b="0">
-                <a:solidFill>
-                  <a:srgbClr val="1F2D3A"/>
-                </a:solidFill>
-              </a:rPr>
-              <a:t>&lt;rect x="335" y="55" width="290" height="185" rx="12" fill="#4a3f2a"/&gt; &lt;text x="480" y="86" text-anchor="middle" font-size="20" fill="#fff" font-weight="bold"&gt;GRİ KUTU&lt;/text&gt; &lt;rect x="385" y="105" width="190" height="70" rx="8" fill="#6b5a3a"/&gt;&lt;text x="480" y="140" text-anchor="middle" font-size="14" fill="#ffd27f"&gt;güç / zaman izi&lt;/text&gt;&lt;text x="480" y="160" text-anchor="middle" font-size="13" fill="#ffd27f"&gt;yan kanal&lt;/text&gt; &lt;text x="480" y="200" text-anchor="middle" font-size="14" fill="#ffd27f"&gt;+ yan kanal (DPA)&lt;/text&gt; &lt;text x="480" y="224" text-anchor="middle" font-size="13" fill="#e0c9a0"&gt;donanım gözlem&lt;/text&gt;</a:t>
-            </a:r>
-          </a:p>
-        </p:txBody>
-      </p:sp>
-      <p:sp>
-        <p:nvSpPr>
-          <p:cNvPr id="10" name="TextBox 9"/>
-          <p:cNvSpPr txBox="1"/>
-          <p:nvPr/>
-        </p:nvSpPr>
-        <p:spPr>
-          <a:xfrm>
-            <a:off x="640080" y="4345178"/>
-            <a:ext cx="10911535" cy="1612138"/>
-          </a:xfrm>
-          <a:prstGeom prst="rect">
-            <a:avLst/>
-          </a:prstGeom>
-          <a:noFill/>
-        </p:spPr>
-        <p:txBody>
-          <a:bodyPr wrap="square" lIns="45720" rIns="45720">
-            <a:spAutoFit/>
-          </a:bodyPr>
-          <a:lstStyle/>
-          <a:p>
-            <a:pPr algn="l"/>
-            <a:r>
-              <a:rPr sz="1300" b="0">
-                <a:solidFill>
-                  <a:srgbClr val="1F2D3A"/>
-                </a:solidFill>
-              </a:rPr>
-              <a:t>&lt;rect x="650" y="55" width="290" height="185" rx="12" fill="#eef7f7" stroke="#c0392b" stroke-width="3"/&gt; &lt;text x="795" y="86" text-anchor="middle" font-size="20" fill="#a01f1f" font-weight="bold"&gt;BEYAZ KUTU&lt;/text&gt; &lt;rect x="700" y="105" width="190" height="70" rx="8" fill="#fff" stroke="#0a9396"/&gt;&lt;text x="795" y="132" text-anchor="middle" font-size="13" fill="#005f66"&gt;bellek · kod · ara&lt;/text&gt;&lt;text x="795" y="152" text-anchor="middle" font-size="13" fill="#005f66"&gt;değerler HEPSİ açık&lt;/text&gt; &lt;text x="795" y="200" text-anchor="middle" font-size="14" fill="#c0392b"&gt;tam erişim (MATE)&lt;/text&gt; &lt;text x="795" y="224" text-anchor="middle" font-size="13" fill="#a01f1f"&gt;WBC bu modelde savaşır&lt;/text&gt; &lt;text x="480" y="272" text-anchor="middle" font-size="15" fill="#555"&gt;Görünürlük soldan sağa artar → WBC en zor modelde anahtar çıkarmayı geciktirir.&lt;/text&gt; &lt;/svg&gt;</a:t>
-            </a:r>
-          </a:p>
-        </p:txBody>
-      </p:sp>
+      <p:pic>
+        <p:nvPicPr>
+          <p:cNvPr id="7" name="Picture 6" descr="h11-01-saldirgan-modelleri.png"/>
+          <p:cNvPicPr>
+            <a:picLocks noChangeAspect="1"/>
+          </p:cNvPicPr>
+          <p:nvPr/>
+        </p:nvPicPr>
+        <p:blipFill>
+          <a:blip r:embed="rId3"/>
+          <a:stretch>
+            <a:fillRect/>
+          </a:stretch>
+        </p:blipFill>
+        <p:spPr>
+          <a:xfrm>
+            <a:off x="1833529" y="1325880"/>
+            <a:ext cx="8524636" cy="3379457"/>
+          </a:xfrm>
+          <a:prstGeom prst="rect">
+            <a:avLst/>
+          </a:prstGeom>
+        </p:spPr>
+      </p:pic>
     </p:spTree>
   </p:cSld>
   <p:clrMapOvr>
